--- a/PPT/DeepLearning09-Keras.pptx
+++ b/PPT/DeepLearning09-Keras.pptx
@@ -5,10 +5,10 @@
     <p:sldMasterId id="2147483653" r:id="rId1"/>
   </p:sldMasterIdLst>
   <p:notesMasterIdLst>
-    <p:notesMasterId r:id="rId28"/>
+    <p:notesMasterId r:id="rId30"/>
   </p:notesMasterIdLst>
   <p:handoutMasterIdLst>
-    <p:handoutMasterId r:id="rId29"/>
+    <p:handoutMasterId r:id="rId31"/>
   </p:handoutMasterIdLst>
   <p:sldIdLst>
     <p:sldId id="264" r:id="rId2"/>
@@ -33,10 +33,12 @@
     <p:sldId id="339" r:id="rId21"/>
     <p:sldId id="341" r:id="rId22"/>
     <p:sldId id="350" r:id="rId23"/>
-    <p:sldId id="347" r:id="rId24"/>
-    <p:sldId id="306" r:id="rId25"/>
-    <p:sldId id="351" r:id="rId26"/>
-    <p:sldId id="352" r:id="rId27"/>
+    <p:sldId id="363" r:id="rId24"/>
+    <p:sldId id="364" r:id="rId25"/>
+    <p:sldId id="360" r:id="rId26"/>
+    <p:sldId id="306" r:id="rId27"/>
+    <p:sldId id="351" r:id="rId28"/>
+    <p:sldId id="352" r:id="rId29"/>
   </p:sldIdLst>
   <p:sldSz cx="9144000" cy="6858000" type="screen4x3"/>
   <p:notesSz cx="6648450" cy="9782175"/>
@@ -3812,13 +3814,6 @@
   <p:clrMapOvr>
     <a:masterClrMapping/>
   </p:clrMapOvr>
-  <p:timing>
-    <p:tnLst>
-      <p:par>
-        <p:cTn id="1" dur="indefinite" restart="never" nodeType="tmRoot"/>
-      </p:par>
-    </p:tnLst>
-  </p:timing>
 </p:sld>
 </file>
 
@@ -3982,13 +3977,6 @@
   <p:clrMapOvr>
     <a:masterClrMapping/>
   </p:clrMapOvr>
-  <p:timing>
-    <p:tnLst>
-      <p:par>
-        <p:cTn id="1" dur="indefinite" restart="never" nodeType="tmRoot"/>
-      </p:par>
-    </p:tnLst>
-  </p:timing>
 </p:sld>
 </file>
 
@@ -4160,13 +4148,6 @@
   <p:clrMapOvr>
     <a:masterClrMapping/>
   </p:clrMapOvr>
-  <p:timing>
-    <p:tnLst>
-      <p:par>
-        <p:cTn id="1" dur="indefinite" restart="never" nodeType="tmRoot"/>
-      </p:par>
-    </p:tnLst>
-  </p:timing>
 </p:sld>
 </file>
 
@@ -4261,13 +4242,6 @@
   <p:clrMapOvr>
     <a:masterClrMapping/>
   </p:clrMapOvr>
-  <p:timing>
-    <p:tnLst>
-      <p:par>
-        <p:cTn id="1" dur="indefinite" restart="never" nodeType="tmRoot"/>
-      </p:par>
-    </p:tnLst>
-  </p:timing>
 </p:sld>
 </file>
 
@@ -4504,13 +4478,6 @@
   <p:clrMapOvr>
     <a:masterClrMapping/>
   </p:clrMapOvr>
-  <p:timing>
-    <p:tnLst>
-      <p:par>
-        <p:cTn id="1" dur="indefinite" restart="never" nodeType="tmRoot"/>
-      </p:par>
-    </p:tnLst>
-  </p:timing>
 </p:sld>
 </file>
 
@@ -4587,13 +4554,6 @@
   <p:clrMapOvr>
     <a:masterClrMapping/>
   </p:clrMapOvr>
-  <p:timing>
-    <p:tnLst>
-      <p:par>
-        <p:cTn id="1" dur="indefinite" restart="never" nodeType="tmRoot"/>
-      </p:par>
-    </p:tnLst>
-  </p:timing>
 </p:sld>
 </file>
 
@@ -4739,13 +4699,6 @@
   <p:clrMapOvr>
     <a:masterClrMapping/>
   </p:clrMapOvr>
-  <p:timing>
-    <p:tnLst>
-      <p:par>
-        <p:cTn id="1" dur="indefinite" restart="never" nodeType="tmRoot"/>
-      </p:par>
-    </p:tnLst>
-  </p:timing>
 </p:sld>
 </file>
 
@@ -4922,13 +4875,6 @@
   <p:clrMapOvr>
     <a:masterClrMapping/>
   </p:clrMapOvr>
-  <p:timing>
-    <p:tnLst>
-      <p:par>
-        <p:cTn id="1" dur="indefinite" restart="never" nodeType="tmRoot"/>
-      </p:par>
-    </p:tnLst>
-  </p:timing>
 </p:sld>
 </file>
 
@@ -5037,13 +4983,6 @@
   <p:clrMapOvr>
     <a:masterClrMapping/>
   </p:clrMapOvr>
-  <p:timing>
-    <p:tnLst>
-      <p:par>
-        <p:cTn id="1" dur="indefinite" restart="never" nodeType="tmRoot"/>
-      </p:par>
-    </p:tnLst>
-  </p:timing>
 </p:sld>
 </file>
 
@@ -5176,13 +5115,6 @@
   <p:clrMapOvr>
     <a:masterClrMapping/>
   </p:clrMapOvr>
-  <p:timing>
-    <p:tnLst>
-      <p:par>
-        <p:cTn id="1" dur="indefinite" restart="never" nodeType="tmRoot"/>
-      </p:par>
-    </p:tnLst>
-  </p:timing>
 </p:sld>
 </file>
 
@@ -5326,13 +5258,6 @@
   <p:clrMapOvr>
     <a:masterClrMapping/>
   </p:clrMapOvr>
-  <p:timing>
-    <p:tnLst>
-      <p:par>
-        <p:cTn id="1" dur="indefinite" restart="never" nodeType="tmRoot"/>
-      </p:par>
-    </p:tnLst>
-  </p:timing>
 </p:sld>
 </file>
 
@@ -5602,13 +5527,6 @@
   <p:clrMapOvr>
     <a:masterClrMapping/>
   </p:clrMapOvr>
-  <p:timing>
-    <p:tnLst>
-      <p:par>
-        <p:cTn id="1" dur="indefinite" restart="never" nodeType="tmRoot"/>
-      </p:par>
-    </p:tnLst>
-  </p:timing>
 </p:sld>
 </file>
 
@@ -5763,13 +5681,6 @@
   <p:clrMapOvr>
     <a:masterClrMapping/>
   </p:clrMapOvr>
-  <p:timing>
-    <p:tnLst>
-      <p:par>
-        <p:cTn id="1" dur="indefinite" restart="never" nodeType="tmRoot"/>
-      </p:par>
-    </p:tnLst>
-  </p:timing>
 </p:sld>
 </file>
 
@@ -5912,13 +5823,6 @@
   <p:clrMapOvr>
     <a:masterClrMapping/>
   </p:clrMapOvr>
-  <p:timing>
-    <p:tnLst>
-      <p:par>
-        <p:cTn id="1" dur="indefinite" restart="never" nodeType="tmRoot"/>
-      </p:par>
-    </p:tnLst>
-  </p:timing>
 </p:sld>
 </file>
 
@@ -6178,13 +6082,6 @@
   <p:clrMapOvr>
     <a:masterClrMapping/>
   </p:clrMapOvr>
-  <p:timing>
-    <p:tnLst>
-      <p:par>
-        <p:cTn id="1" dur="indefinite" restart="never" nodeType="tmRoot"/>
-      </p:par>
-    </p:tnLst>
-  </p:timing>
 </p:sld>
 </file>
 
@@ -6207,7 +6104,13 @@
       </p:grpSpPr>
       <p:sp>
         <p:nvSpPr>
-          <p:cNvPr id="2" name="Titre 1"/>
+          <p:cNvPr id="2" name="Titre 1">
+            <a:extLst>
+              <a:ext uri="{FF2B5EF4-FFF2-40B4-BE49-F238E27FC236}">
+                <a16:creationId xmlns:a16="http://schemas.microsoft.com/office/drawing/2014/main" id="{86A9CDA0-2EBB-006A-DD48-9754978B4E3D}"/>
+              </a:ext>
+            </a:extLst>
+          </p:cNvPr>
           <p:cNvSpPr>
             <a:spLocks noGrp="1"/>
           </p:cNvSpPr>
@@ -6221,16 +6124,21 @@
           <a:lstStyle/>
           <a:p>
             <a:r>
-              <a:rPr lang="fr-FR" dirty="0" err="1"/>
-              <a:t>Softmax</a:t>
-            </a:r>
-            <a:endParaRPr lang="fr-FR" dirty="0"/>
+              <a:rPr lang="fr-FR" dirty="0"/>
+              <a:t>Régression</a:t>
+            </a:r>
           </a:p>
         </p:txBody>
       </p:sp>
       <p:sp>
         <p:nvSpPr>
-          <p:cNvPr id="3" name="Espace réservé du contenu 2"/>
+          <p:cNvPr id="3" name="Espace réservé du contenu 2">
+            <a:extLst>
+              <a:ext uri="{FF2B5EF4-FFF2-40B4-BE49-F238E27FC236}">
+                <a16:creationId xmlns:a16="http://schemas.microsoft.com/office/drawing/2014/main" id="{684B2193-F0F4-4F87-60CA-C36AEC5E4FFC}"/>
+              </a:ext>
+            </a:extLst>
+          </p:cNvPr>
           <p:cNvSpPr>
             <a:spLocks noGrp="1"/>
           </p:cNvSpPr>
@@ -6245,64 +6153,83 @@
           <a:p>
             <a:r>
               <a:rPr lang="fr-FR" dirty="0"/>
-              <a:t>Si le nombre de catégorie est = 2</a:t>
-            </a:r>
-          </a:p>
-          <a:p>
-            <a:pPr lvl="1"/>
-            <a:r>
-              <a:rPr lang="fr-FR" dirty="0"/>
-              <a:t>Il faut un output layer avec 1 neurone</a:t>
-            </a:r>
-          </a:p>
-          <a:p>
-            <a:pPr lvl="1"/>
-            <a:r>
-              <a:rPr lang="fr-FR" dirty="0"/>
-              <a:t>L’activation </a:t>
-            </a:r>
-            <a:r>
-              <a:rPr lang="fr-FR" dirty="0" err="1"/>
-              <a:t>sigmoid</a:t>
-            </a:r>
-            <a:r>
-              <a:rPr lang="fr-FR" dirty="0"/>
-              <a:t> est couramment utilisée</a:t>
-            </a:r>
-          </a:p>
-          <a:p>
-            <a:pPr lvl="1"/>
-            <a:r>
-              <a:rPr lang="fr-FR" dirty="0"/>
-              <a:t>Il est possible également d’avoir un output layer avec 2 neurones, mais il est indispensable que la somme des sorties = 1</a:t>
-            </a:r>
-          </a:p>
-          <a:p>
-            <a:r>
-              <a:rPr lang="fr-FR" dirty="0"/>
-              <a:t>Si le nombre de catégorie &gt; 2</a:t>
-            </a:r>
-          </a:p>
-          <a:p>
-            <a:pPr lvl="1"/>
-            <a:r>
-              <a:rPr lang="fr-FR" dirty="0"/>
-              <a:t>Il faut autant d’output que de catégorie</a:t>
-            </a:r>
-          </a:p>
-          <a:p>
-            <a:pPr lvl="1"/>
-            <a:r>
-              <a:rPr lang="fr-FR" dirty="0"/>
-              <a:t>L’activation </a:t>
-            </a:r>
-            <a:r>
-              <a:rPr lang="fr-FR" dirty="0" err="1"/>
-              <a:t>softmax</a:t>
-            </a:r>
-            <a:r>
-              <a:rPr lang="fr-FR" dirty="0"/>
-              <a:t> doit être utilisée</a:t>
+              <a:t>En TF il n'y a pas de différence entre catégorisation et régression</a:t>
+            </a:r>
+          </a:p>
+          <a:p>
+            <a:r>
+              <a:rPr lang="fr-FR" dirty="0"/>
+              <a:t>Pour régression il faut autant de sortie que de prédiction</a:t>
+            </a:r>
+          </a:p>
+          <a:p>
+            <a:pPr lvl="1"/>
+            <a:r>
+              <a:rPr lang="fr-FR" dirty="0"/>
+              <a:t>Si y est borné par un </a:t>
+            </a:r>
+            <a:r>
+              <a:rPr lang="fr-FR" dirty="0" err="1"/>
+              <a:t>MinMaxScaler</a:t>
+            </a:r>
+            <a:r>
+              <a:rPr lang="fr-FR" dirty="0"/>
+              <a:t> utiliser une </a:t>
+            </a:r>
+            <a:r>
+              <a:rPr lang="fr-FR" dirty="0" err="1"/>
+              <a:t>sïgmoide</a:t>
+            </a:r>
+            <a:endParaRPr lang="fr-FR" dirty="0"/>
+          </a:p>
+          <a:p>
+            <a:pPr lvl="1"/>
+            <a:r>
+              <a:rPr lang="fr-FR" dirty="0"/>
+              <a:t>Si y est borné par un </a:t>
+            </a:r>
+            <a:r>
+              <a:rPr lang="fr-FR" dirty="0" err="1"/>
+              <a:t>StandardScaler</a:t>
+            </a:r>
+            <a:r>
+              <a:rPr lang="fr-FR" dirty="0"/>
+              <a:t> utiliser une </a:t>
+            </a:r>
+            <a:r>
+              <a:rPr lang="fr-FR" dirty="0" err="1"/>
+              <a:t>tanh</a:t>
+            </a:r>
+            <a:endParaRPr lang="fr-FR" dirty="0"/>
+          </a:p>
+          <a:p>
+            <a:pPr lvl="1"/>
+            <a:r>
+              <a:rPr lang="fr-FR" dirty="0"/>
+              <a:t>Sinon utiliser </a:t>
+            </a:r>
+            <a:r>
+              <a:rPr lang="fr-FR" dirty="0" err="1"/>
+              <a:t>linear</a:t>
+            </a:r>
+            <a:endParaRPr lang="fr-FR" dirty="0"/>
+          </a:p>
+          <a:p>
+            <a:pPr lvl="1"/>
+            <a:r>
+              <a:rPr lang="fr-FR" dirty="0"/>
+              <a:t>Dénormaliser les y avec </a:t>
+            </a:r>
+            <a:r>
+              <a:rPr lang="fr-FR" dirty="0" err="1"/>
+              <a:t>scaler.inverse_transform</a:t>
+            </a:r>
+            <a:endParaRPr lang="fr-FR" dirty="0"/>
+          </a:p>
+          <a:p>
+            <a:r>
+              <a:rPr lang="fr-FR" dirty="0"/>
+              <a:t>Démo tf_regression.py</a:t>
             </a:r>
           </a:p>
         </p:txBody>
@@ -6310,20 +6237,13 @@
     </p:spTree>
     <p:extLst>
       <p:ext uri="{BB962C8B-B14F-4D97-AF65-F5344CB8AC3E}">
-        <p14:creationId xmlns:p14="http://schemas.microsoft.com/office/powerpoint/2010/main" val="1421864535"/>
+        <p14:creationId xmlns:p14="http://schemas.microsoft.com/office/powerpoint/2010/main" val="137932723"/>
       </p:ext>
     </p:extLst>
   </p:cSld>
   <p:clrMapOvr>
     <a:masterClrMapping/>
   </p:clrMapOvr>
-  <p:timing>
-    <p:tnLst>
-      <p:par>
-        <p:cTn id="1" dur="indefinite" restart="never" nodeType="tmRoot"/>
-      </p:par>
-    </p:tnLst>
-  </p:timing>
 </p:sld>
 </file>
 
@@ -6360,9 +6280,10 @@
           <a:lstStyle/>
           <a:p>
             <a:r>
-              <a:rPr lang="fr-FR"/>
-              <a:t>Solidification du modèle</a:t>
-            </a:r>
+              <a:rPr lang="fr-FR" dirty="0" err="1"/>
+              <a:t>Softmax</a:t>
+            </a:r>
+            <a:endParaRPr lang="fr-FR" dirty="0"/>
           </a:p>
         </p:txBody>
       </p:sp>
@@ -6383,6 +6304,306 @@
           <a:p>
             <a:r>
               <a:rPr lang="fr-FR" dirty="0"/>
+              <a:t>Il faut autant d’output que de catégorie</a:t>
+            </a:r>
+          </a:p>
+          <a:p>
+            <a:r>
+              <a:rPr lang="fr-FR" dirty="0"/>
+              <a:t>L’activation </a:t>
+            </a:r>
+            <a:r>
+              <a:rPr lang="fr-FR" dirty="0" err="1"/>
+              <a:t>softmax</a:t>
+            </a:r>
+            <a:r>
+              <a:rPr lang="fr-FR" dirty="0"/>
+              <a:t> doit être utilisée</a:t>
+            </a:r>
+          </a:p>
+          <a:p>
+            <a:r>
+              <a:rPr lang="fr-FR" dirty="0"/>
+              <a:t>La somme des </a:t>
+            </a:r>
+            <a:r>
+              <a:rPr lang="fr-FR" dirty="0" err="1"/>
+              <a:t>softmax</a:t>
+            </a:r>
+            <a:r>
+              <a:rPr lang="fr-FR" dirty="0"/>
+              <a:t> = 1</a:t>
+            </a:r>
+          </a:p>
+          <a:p>
+            <a:r>
+              <a:rPr lang="fr-FR" dirty="0" err="1"/>
+              <a:t>softmax</a:t>
+            </a:r>
+            <a:r>
+              <a:rPr lang="fr-FR" dirty="0"/>
+              <a:t>(x) = </a:t>
+            </a:r>
+            <a:r>
+              <a:rPr lang="fr-FR" dirty="0" err="1"/>
+              <a:t>exp</a:t>
+            </a:r>
+            <a:r>
+              <a:rPr lang="fr-FR" dirty="0"/>
+              <a:t>(x) / </a:t>
+            </a:r>
+            <a:r>
+              <a:rPr lang="fr-FR" dirty="0" err="1"/>
+              <a:t>sum</a:t>
+            </a:r>
+            <a:r>
+              <a:rPr lang="fr-FR" dirty="0"/>
+              <a:t>(</a:t>
+            </a:r>
+            <a:r>
+              <a:rPr lang="fr-FR" dirty="0" err="1"/>
+              <a:t>exp</a:t>
+            </a:r>
+            <a:r>
+              <a:rPr lang="fr-FR"/>
+              <a:t>(x))</a:t>
+            </a:r>
+            <a:endParaRPr lang="fr-FR" dirty="0"/>
+          </a:p>
+        </p:txBody>
+      </p:sp>
+    </p:spTree>
+    <p:extLst>
+      <p:ext uri="{BB962C8B-B14F-4D97-AF65-F5344CB8AC3E}">
+        <p14:creationId xmlns:p14="http://schemas.microsoft.com/office/powerpoint/2010/main" val="3637411119"/>
+      </p:ext>
+    </p:extLst>
+  </p:cSld>
+  <p:clrMapOvr>
+    <a:masterClrMapping/>
+  </p:clrMapOvr>
+</p:sld>
+</file>
+
+<file path=ppt/slides/slide25.xml><?xml version="1.0" encoding="utf-8"?>
+<p:sld xmlns:a="http://schemas.openxmlformats.org/drawingml/2006/main" xmlns:r="http://schemas.openxmlformats.org/officeDocument/2006/relationships" xmlns:p="http://schemas.openxmlformats.org/presentationml/2006/main">
+  <p:cSld>
+    <p:spTree>
+      <p:nvGrpSpPr>
+        <p:cNvPr id="1" name=""/>
+        <p:cNvGrpSpPr/>
+        <p:nvPr/>
+      </p:nvGrpSpPr>
+      <p:grpSpPr>
+        <a:xfrm>
+          <a:off x="0" y="0"/>
+          <a:ext cx="0" cy="0"/>
+          <a:chOff x="0" y="0"/>
+          <a:chExt cx="0" cy="0"/>
+        </a:xfrm>
+      </p:grpSpPr>
+      <p:sp>
+        <p:nvSpPr>
+          <p:cNvPr id="2" name="Titre 1">
+            <a:extLst>
+              <a:ext uri="{FF2B5EF4-FFF2-40B4-BE49-F238E27FC236}">
+                <a16:creationId xmlns:a16="http://schemas.microsoft.com/office/drawing/2014/main" id="{A2162A88-0ECC-A0B0-99CA-CE291892C1B1}"/>
+              </a:ext>
+            </a:extLst>
+          </p:cNvPr>
+          <p:cNvSpPr>
+            <a:spLocks noGrp="1"/>
+          </p:cNvSpPr>
+          <p:nvPr>
+            <p:ph type="title"/>
+          </p:nvPr>
+        </p:nvSpPr>
+        <p:spPr/>
+        <p:txBody>
+          <a:bodyPr/>
+          <a:lstStyle/>
+          <a:p>
+            <a:r>
+              <a:rPr lang="fr-FR" dirty="0" err="1"/>
+              <a:t>to_categorical</a:t>
+            </a:r>
+            <a:endParaRPr lang="fr-FR" dirty="0"/>
+          </a:p>
+        </p:txBody>
+      </p:sp>
+      <p:sp>
+        <p:nvSpPr>
+          <p:cNvPr id="3" name="Espace réservé du contenu 2">
+            <a:extLst>
+              <a:ext uri="{FF2B5EF4-FFF2-40B4-BE49-F238E27FC236}">
+                <a16:creationId xmlns:a16="http://schemas.microsoft.com/office/drawing/2014/main" id="{BE0F76FA-FEF4-575F-0324-58FC94BFFB7A}"/>
+              </a:ext>
+            </a:extLst>
+          </p:cNvPr>
+          <p:cNvSpPr>
+            <a:spLocks noGrp="1"/>
+          </p:cNvSpPr>
+          <p:nvPr>
+            <p:ph idx="1"/>
+          </p:nvPr>
+        </p:nvSpPr>
+        <p:spPr/>
+        <p:txBody>
+          <a:bodyPr/>
+          <a:lstStyle/>
+          <a:p>
+            <a:r>
+              <a:rPr lang="fr-FR" dirty="0"/>
+              <a:t>Comme la ne nombre de sortie est &gt; 1 il faut un y sous forme de matrice</a:t>
+            </a:r>
+          </a:p>
+          <a:p>
+            <a:pPr lvl="1"/>
+            <a:r>
+              <a:rPr lang="fr-FR" dirty="0" err="1"/>
+              <a:t>y.shape</a:t>
+            </a:r>
+            <a:r>
+              <a:rPr lang="fr-FR" dirty="0"/>
+              <a:t>(-1, </a:t>
+            </a:r>
+            <a:r>
+              <a:rPr lang="fr-FR" dirty="0" err="1"/>
+              <a:t>nb_output</a:t>
+            </a:r>
+            <a:r>
+              <a:rPr lang="fr-FR" dirty="0"/>
+              <a:t>)</a:t>
+            </a:r>
+          </a:p>
+          <a:p>
+            <a:r>
+              <a:rPr lang="fr-FR" dirty="0" err="1"/>
+              <a:t>to_categorical</a:t>
+            </a:r>
+            <a:r>
+              <a:rPr lang="fr-FR" dirty="0"/>
+              <a:t> transforme le vecteur y en matrice</a:t>
+            </a:r>
+          </a:p>
+          <a:p>
+            <a:r>
+              <a:rPr lang="fr-FR" dirty="0"/>
+              <a:t>Par exemple si j'ai 3 outputs</a:t>
+            </a:r>
+          </a:p>
+          <a:p>
+            <a:pPr lvl="1"/>
+            <a:r>
+              <a:rPr lang="fr-FR" dirty="0" err="1"/>
+              <a:t>ytrain</a:t>
+            </a:r>
+            <a:r>
+              <a:rPr lang="fr-FR" dirty="0"/>
+              <a:t> = </a:t>
+            </a:r>
+            <a:r>
+              <a:rPr lang="fr-FR" dirty="0" err="1"/>
+              <a:t>tf.keras.utils.to_categorical</a:t>
+            </a:r>
+            <a:r>
+              <a:rPr lang="fr-FR" dirty="0"/>
+              <a:t>(</a:t>
+            </a:r>
+            <a:r>
+              <a:rPr lang="fr-FR" dirty="0" err="1"/>
+              <a:t>ytrain</a:t>
+            </a:r>
+            <a:r>
+              <a:rPr lang="fr-FR" dirty="0"/>
+              <a:t>, 3)</a:t>
+            </a:r>
+          </a:p>
+          <a:p>
+            <a:pPr lvl="1"/>
+            <a:r>
+              <a:rPr lang="fr-FR" dirty="0"/>
+              <a:t>[0, 1, 2] en [[1, 0, 0],[0, 1, 0],[0, 0, 1]</a:t>
+            </a:r>
+          </a:p>
+          <a:p>
+            <a:pPr lvl="1"/>
+            <a:endParaRPr lang="fr-FR" dirty="0"/>
+          </a:p>
+          <a:p>
+            <a:endParaRPr lang="fr-FR" dirty="0"/>
+          </a:p>
+        </p:txBody>
+      </p:sp>
+    </p:spTree>
+    <p:extLst>
+      <p:ext uri="{BB962C8B-B14F-4D97-AF65-F5344CB8AC3E}">
+        <p14:creationId xmlns:p14="http://schemas.microsoft.com/office/powerpoint/2010/main" val="1910331293"/>
+      </p:ext>
+    </p:extLst>
+  </p:cSld>
+  <p:clrMapOvr>
+    <a:masterClrMapping/>
+  </p:clrMapOvr>
+</p:sld>
+</file>
+
+<file path=ppt/slides/slide26.xml><?xml version="1.0" encoding="utf-8"?>
+<p:sld xmlns:a="http://schemas.openxmlformats.org/drawingml/2006/main" xmlns:r="http://schemas.openxmlformats.org/officeDocument/2006/relationships" xmlns:p="http://schemas.openxmlformats.org/presentationml/2006/main">
+  <p:cSld>
+    <p:spTree>
+      <p:nvGrpSpPr>
+        <p:cNvPr id="1" name=""/>
+        <p:cNvGrpSpPr/>
+        <p:nvPr/>
+      </p:nvGrpSpPr>
+      <p:grpSpPr>
+        <a:xfrm>
+          <a:off x="0" y="0"/>
+          <a:ext cx="0" cy="0"/>
+          <a:chOff x="0" y="0"/>
+          <a:chExt cx="0" cy="0"/>
+        </a:xfrm>
+      </p:grpSpPr>
+      <p:sp>
+        <p:nvSpPr>
+          <p:cNvPr id="2" name="Titre 1"/>
+          <p:cNvSpPr>
+            <a:spLocks noGrp="1"/>
+          </p:cNvSpPr>
+          <p:nvPr>
+            <p:ph type="title"/>
+          </p:nvPr>
+        </p:nvSpPr>
+        <p:spPr/>
+        <p:txBody>
+          <a:bodyPr/>
+          <a:lstStyle/>
+          <a:p>
+            <a:r>
+              <a:rPr lang="fr-FR"/>
+              <a:t>Solidification du modèle</a:t>
+            </a:r>
+          </a:p>
+        </p:txBody>
+      </p:sp>
+      <p:sp>
+        <p:nvSpPr>
+          <p:cNvPr id="3" name="Espace réservé du contenu 2"/>
+          <p:cNvSpPr>
+            <a:spLocks noGrp="1"/>
+          </p:cNvSpPr>
+          <p:nvPr>
+            <p:ph idx="1"/>
+          </p:nvPr>
+        </p:nvSpPr>
+        <p:spPr/>
+        <p:txBody>
+          <a:bodyPr/>
+          <a:lstStyle/>
+          <a:p>
+            <a:r>
+              <a:rPr lang="fr-FR" dirty="0"/>
               <a:t>Il est possible de sauvegarder entièrement le modèle</a:t>
             </a:r>
           </a:p>
@@ -6443,17 +6664,10 @@
   <p:clrMapOvr>
     <a:masterClrMapping/>
   </p:clrMapOvr>
-  <p:timing>
-    <p:tnLst>
-      <p:par>
-        <p:cTn id="1" dur="indefinite" restart="never" nodeType="tmRoot"/>
-      </p:par>
-    </p:tnLst>
-  </p:timing>
 </p:sld>
 </file>
 
-<file path=ppt/slides/slide25.xml><?xml version="1.0" encoding="utf-8"?>
+<file path=ppt/slides/slide27.xml><?xml version="1.0" encoding="utf-8"?>
 <p:sld xmlns:a="http://schemas.openxmlformats.org/drawingml/2006/main" xmlns:r="http://schemas.openxmlformats.org/officeDocument/2006/relationships" xmlns:p="http://schemas.openxmlformats.org/presentationml/2006/main">
   <p:cSld>
     <p:spTree>
@@ -6668,17 +6882,10 @@
   <p:clrMapOvr>
     <a:masterClrMapping/>
   </p:clrMapOvr>
-  <p:timing>
-    <p:tnLst>
-      <p:par>
-        <p:cTn id="1" dur="indefinite" restart="never" nodeType="tmRoot"/>
-      </p:par>
-    </p:tnLst>
-  </p:timing>
 </p:sld>
 </file>
 
-<file path=ppt/slides/slide26.xml><?xml version="1.0" encoding="utf-8"?>
+<file path=ppt/slides/slide28.xml><?xml version="1.0" encoding="utf-8"?>
 <p:sld xmlns:a="http://schemas.openxmlformats.org/drawingml/2006/main" xmlns:r="http://schemas.openxmlformats.org/officeDocument/2006/relationships" xmlns:p="http://schemas.openxmlformats.org/presentationml/2006/main">
   <p:cSld>
     <p:spTree>
@@ -6903,13 +7110,6 @@
   <p:clrMapOvr>
     <a:masterClrMapping/>
   </p:clrMapOvr>
-  <p:timing>
-    <p:tnLst>
-      <p:par>
-        <p:cTn id="1" dur="indefinite" restart="never" nodeType="tmRoot"/>
-      </p:par>
-    </p:tnLst>
-  </p:timing>
 </p:sld>
 </file>
 
@@ -7023,13 +7223,6 @@
   <p:clrMapOvr>
     <a:masterClrMapping/>
   </p:clrMapOvr>
-  <p:timing>
-    <p:tnLst>
-      <p:par>
-        <p:cTn id="1" dur="indefinite" restart="never" nodeType="tmRoot"/>
-      </p:par>
-    </p:tnLst>
-  </p:timing>
 </p:sld>
 </file>
 
@@ -7131,13 +7324,6 @@
   <p:clrMapOvr>
     <a:masterClrMapping/>
   </p:clrMapOvr>
-  <p:timing>
-    <p:tnLst>
-      <p:par>
-        <p:cTn id="1" dur="indefinite" restart="never" nodeType="tmRoot"/>
-      </p:par>
-    </p:tnLst>
-  </p:timing>
 </p:sld>
 </file>
 
@@ -7366,13 +7552,6 @@
   <p:clrMapOvr>
     <a:masterClrMapping/>
   </p:clrMapOvr>
-  <p:timing>
-    <p:tnLst>
-      <p:par>
-        <p:cTn id="1" dur="indefinite" restart="never" nodeType="tmRoot"/>
-      </p:par>
-    </p:tnLst>
-  </p:timing>
 </p:sld>
 </file>
 
@@ -7497,13 +7676,6 @@
   <p:clrMapOvr>
     <a:masterClrMapping/>
   </p:clrMapOvr>
-  <p:timing>
-    <p:tnLst>
-      <p:par>
-        <p:cTn id="1" dur="indefinite" restart="never" nodeType="tmRoot"/>
-      </p:par>
-    </p:tnLst>
-  </p:timing>
 </p:sld>
 </file>
 
@@ -7608,13 +7780,8 @@
             <a:pPr lvl="1"/>
             <a:r>
               <a:rPr lang="fr-FR" dirty="0"/>
-              <a:t>Compatible pour tout graphe </a:t>
-            </a:r>
-            <a:r>
-              <a:rPr lang="fr-FR" dirty="0" smtClean="0"/>
-              <a:t>cyclique</a:t>
-            </a:r>
-            <a:endParaRPr lang="fr-FR" dirty="0"/>
+              <a:t>Compatible pour tout graphe cyclique</a:t>
+            </a:r>
           </a:p>
           <a:p>
             <a:pPr lvl="1"/>
@@ -7635,13 +7802,6 @@
   <p:clrMapOvr>
     <a:masterClrMapping/>
   </p:clrMapOvr>
-  <p:timing>
-    <p:tnLst>
-      <p:par>
-        <p:cTn id="1" dur="indefinite" restart="never" nodeType="tmRoot"/>
-      </p:par>
-    </p:tnLst>
-  </p:timing>
 </p:sld>
 </file>
 
@@ -7810,13 +7970,6 @@
   <p:clrMapOvr>
     <a:masterClrMapping/>
   </p:clrMapOvr>
-  <p:timing>
-    <p:tnLst>
-      <p:par>
-        <p:cTn id="1" dur="indefinite" restart="never" nodeType="tmRoot"/>
-      </p:par>
-    </p:tnLst>
-  </p:timing>
 </p:sld>
 </file>
 
@@ -8002,13 +8155,6 @@
   <p:clrMapOvr>
     <a:masterClrMapping/>
   </p:clrMapOvr>
-  <p:timing>
-    <p:tnLst>
-      <p:par>
-        <p:cTn id="1" dur="indefinite" restart="never" nodeType="tmRoot"/>
-      </p:par>
-    </p:tnLst>
-  </p:timing>
 </p:sld>
 </file>
 

--- a/PPT/DeepLearning09-Keras.pptx
+++ b/PPT/DeepLearning09-Keras.pptx
@@ -6454,7 +6454,7 @@
           <a:p>
             <a:r>
               <a:rPr lang="fr-FR" dirty="0"/>
-              <a:t>Comme la ne nombre de sortie est &gt; 1 il faut un y sous forme de matrice</a:t>
+              <a:t>Comme le nombre de sortie est &gt; 1 il faut un y sous forme de matrice</a:t>
             </a:r>
           </a:p>
           <a:p>
